--- a/dist/초1/국어/한글/초1_국어_한글_04_받침있는글자_학생용.pptx
+++ b/dist/초1/국어/한글/초1_국어_한글_04_받침있는글자_학생용.pptx
@@ -119,19 +119,19 @@
   <p:extLst>
     <p:ext uri="{521415D9-36F7-43E2-AB2F-B90AF26B5E84}">
       <p14:sectionLst xmlns:p14="http://schemas.microsoft.com/office/powerpoint/2010/main">
-        <p14:section name="도입" id="{04394324-3d10-d0bc-ab4d-73b5e65be812}">
+        <p14:section name="도입" id="{bacdb89c-9613-a526-d8ad-73c171c15d4b}">
           <p14:sldIdLst>
             <p14:sldId id="256"/>
             <p14:sldId id="257"/>
           </p14:sldIdLst>
         </p14:section>
-        <p14:section name="개념" id="{3681eaa8-26af-9e4c-92c8-93494d340b67}">
+        <p14:section name="개념" id="{be08cd32-6291-8f53-cefe-40b164682e21}">
           <p14:sldIdLst>
             <p14:sldId id="258"/>
             <p14:sldId id="259"/>
           </p14:sldIdLst>
         </p14:section>
-        <p14:section name="연습" id="{f9950617-d588-45be-3dc1-1f25f6d02584}">
+        <p14:section name="연습" id="{444fdfa9-3fa3-7b55-9a3b-22a498333564}">
           <p14:sldIdLst>
             <p14:sldId id="260"/>
             <p14:sldId id="261"/>
@@ -140,18 +140,18 @@
             <p14:sldId id="264"/>
           </p14:sldIdLst>
         </p14:section>
-        <p14:section name="확인" id="{e5090676-fba2-20fe-24cc-4a8d3c7208e1}">
+        <p14:section name="확인" id="{0c4d203a-3eab-203e-d516-e0d95f6bd55b}">
           <p14:sldIdLst>
             <p14:sldId id="265"/>
             <p14:sldId id="266"/>
           </p14:sldIdLst>
         </p14:section>
-        <p14:section name="정리" id="{476902a1-4789-d372-64e4-c3b2ebb4d0df}">
+        <p14:section name="정리" id="{d97865e0-e312-eedc-5704-15042061fe5a}">
           <p14:sldIdLst>
             <p14:sldId id="267"/>
           </p14:sldIdLst>
         </p14:section>
-        <p14:section name="보충" id="{de3659d2-9723-8e47-4d2f-5ca53fd30bc6}">
+        <p14:section name="보충" id="{a51e4717-844e-2e61-ca0c-f4cb5f1ceced}">
           <p14:sldIdLst>
             <p14:sldId id="268"/>
           </p14:sldIdLst>

--- a/dist/초1/국어/한글/초1_국어_한글_04_받침있는글자_학생용.pptx
+++ b/dist/초1/국어/한글/초1_국어_한글_04_받침있는글자_학생용.pptx
@@ -119,19 +119,19 @@
   <p:extLst>
     <p:ext uri="{521415D9-36F7-43E2-AB2F-B90AF26B5E84}">
       <p14:sectionLst xmlns:p14="http://schemas.microsoft.com/office/powerpoint/2010/main">
-        <p14:section name="도입" id="{bacdb89c-9613-a526-d8ad-73c171c15d4b}">
+        <p14:section name="도입" id="{965e2592-7d67-2817-bd60-f2c38198e7cf}">
           <p14:sldIdLst>
             <p14:sldId id="256"/>
             <p14:sldId id="257"/>
           </p14:sldIdLst>
         </p14:section>
-        <p14:section name="개념" id="{be08cd32-6291-8f53-cefe-40b164682e21}">
+        <p14:section name="개념" id="{a0c04ff4-23db-00f9-cae7-e97bb6c5aa03}">
           <p14:sldIdLst>
             <p14:sldId id="258"/>
             <p14:sldId id="259"/>
           </p14:sldIdLst>
         </p14:section>
-        <p14:section name="연습" id="{444fdfa9-3fa3-7b55-9a3b-22a498333564}">
+        <p14:section name="연습" id="{5913e2cd-ad62-cb31-88ca-d5ac83224eb3}">
           <p14:sldIdLst>
             <p14:sldId id="260"/>
             <p14:sldId id="261"/>
@@ -140,18 +140,18 @@
             <p14:sldId id="264"/>
           </p14:sldIdLst>
         </p14:section>
-        <p14:section name="확인" id="{0c4d203a-3eab-203e-d516-e0d95f6bd55b}">
+        <p14:section name="확인" id="{5fb5f5bf-61f9-2a06-59fe-2f6ddaeb0f01}">
           <p14:sldIdLst>
             <p14:sldId id="265"/>
             <p14:sldId id="266"/>
           </p14:sldIdLst>
         </p14:section>
-        <p14:section name="정리" id="{d97865e0-e312-eedc-5704-15042061fe5a}">
+        <p14:section name="정리" id="{bedc1f05-3415-6468-6ae2-012aeefff5f6}">
           <p14:sldIdLst>
             <p14:sldId id="267"/>
           </p14:sldIdLst>
         </p14:section>
-        <p14:section name="보충" id="{a51e4717-844e-2e61-ca0c-f4cb5f1ceced}">
+        <p14:section name="보충" id="{4f0e8c87-b29e-58f3-b75c-d62430c6b1c9}">
           <p14:sldIdLst>
             <p14:sldId id="268"/>
           </p14:sldIdLst>
@@ -3118,7 +3118,7 @@
         <p:spPr>
           <a:xfrm>
             <a:off x="1344168" y="2011680"/>
-            <a:ext cx="1965960" cy="1280160"/>
+            <a:ext cx="2606040" cy="1280160"/>
           </a:xfrm>
           <a:prstGeom prst="roundRect">
             <a:avLst>
@@ -3164,8 +3164,8 @@
         </p:nvSpPr>
         <p:spPr>
           <a:xfrm>
-            <a:off x="3584448" y="2011680"/>
-            <a:ext cx="1965960" cy="1280160"/>
+            <a:off x="4224528" y="2011680"/>
+            <a:ext cx="2606040" cy="1280160"/>
           </a:xfrm>
           <a:prstGeom prst="roundRect">
             <a:avLst>
@@ -3259,7 +3259,7 @@
         <p:spPr>
           <a:xfrm>
             <a:off x="1344168" y="3474720"/>
-            <a:ext cx="1965960" cy="1280160"/>
+            <a:ext cx="2606040" cy="1280160"/>
           </a:xfrm>
           <a:prstGeom prst="roundRect">
             <a:avLst>
@@ -3305,8 +3305,8 @@
         </p:nvSpPr>
         <p:spPr>
           <a:xfrm>
-            <a:off x="3584448" y="3474720"/>
-            <a:ext cx="1965960" cy="1280160"/>
+            <a:off x="4224528" y="3474720"/>
+            <a:ext cx="2606040" cy="1280160"/>
           </a:xfrm>
           <a:prstGeom prst="roundRect">
             <a:avLst>
@@ -5210,7 +5210,7 @@
         </p:nvSpPr>
         <p:spPr>
           <a:xfrm>
-            <a:off x="548640" y="2459736"/>
+            <a:off x="548640" y="2734056"/>
             <a:ext cx="566928" cy="566928"/>
           </a:xfrm>
           <a:prstGeom prst="roundRect">
@@ -5257,12 +5257,12 @@
         </p:nvSpPr>
         <p:spPr>
           <a:xfrm>
-            <a:off x="1344168" y="2109216"/>
-            <a:ext cx="1267968" cy="1267968"/>
+            <a:off x="1828800" y="2331720"/>
+            <a:ext cx="1371600" cy="1371600"/>
           </a:xfrm>
           <a:prstGeom prst="roundRect">
             <a:avLst>
-              <a:gd name="adj" fmla="val 10096"/>
+              <a:gd name="adj" fmla="val 9333"/>
             </a:avLst>
           </a:prstGeom>
           <a:solidFill>
@@ -5282,7 +5282,7 @@
               <a:buNone/>
             </a:pPr>
             <a:r>
-              <a:rPr lang="ko-KR" altLang="en-US" sz="5500" b="1" dirty="0">
+              <a:rPr lang="ko-KR" altLang="en-US" sz="5900" b="1" dirty="0">
                 <a:solidFill>
                   <a:srgbClr val="1F2937"/>
                 </a:solidFill>
@@ -5292,7 +5292,7 @@
               </a:rPr>
               <a:t>고</a:t>
             </a:r>
-            <a:endParaRPr lang="ko-KR" sz="5500" dirty="0"/>
+            <a:endParaRPr lang="ko-KR" sz="5900" dirty="0"/>
           </a:p>
         </p:txBody>
       </p:sp>
@@ -5304,12 +5304,12 @@
         </p:nvSpPr>
         <p:spPr>
           <a:xfrm>
-            <a:off x="2813304" y="2109216"/>
-            <a:ext cx="1267968" cy="1267968"/>
+            <a:off x="3401568" y="2331720"/>
+            <a:ext cx="1371600" cy="1371600"/>
           </a:xfrm>
           <a:prstGeom prst="roundRect">
             <a:avLst>
-              <a:gd name="adj" fmla="val 10096"/>
+              <a:gd name="adj" fmla="val 9333"/>
             </a:avLst>
           </a:prstGeom>
           <a:solidFill>
@@ -5329,7 +5329,7 @@
               <a:buNone/>
             </a:pPr>
             <a:r>
-              <a:rPr lang="ko-KR" altLang="en-US" sz="5500" b="1" dirty="0">
+              <a:rPr lang="ko-KR" altLang="en-US" sz="5900" b="1" dirty="0">
                 <a:solidFill>
                   <a:srgbClr val="1F2937"/>
                 </a:solidFill>
@@ -5339,7 +5339,7 @@
               </a:rPr>
               <a:t>너</a:t>
             </a:r>
-            <a:endParaRPr lang="ko-KR" sz="5500" dirty="0"/>
+            <a:endParaRPr lang="ko-KR" sz="5900" dirty="0"/>
           </a:p>
         </p:txBody>
       </p:sp>
@@ -5351,12 +5351,12 @@
         </p:nvSpPr>
         <p:spPr>
           <a:xfrm>
-            <a:off x="4282440" y="2109216"/>
-            <a:ext cx="1267968" cy="1267968"/>
+            <a:off x="4974336" y="2331720"/>
+            <a:ext cx="1371600" cy="1371600"/>
           </a:xfrm>
           <a:prstGeom prst="roundRect">
             <a:avLst>
-              <a:gd name="adj" fmla="val 10096"/>
+              <a:gd name="adj" fmla="val 9333"/>
             </a:avLst>
           </a:prstGeom>
           <a:solidFill>
@@ -5376,7 +5376,7 @@
               <a:buNone/>
             </a:pPr>
             <a:r>
-              <a:rPr lang="ko-KR" altLang="en-US" sz="5500" b="1" dirty="0">
+              <a:rPr lang="ko-KR" altLang="en-US" sz="5900" b="1" dirty="0">
                 <a:solidFill>
                   <a:srgbClr val="1F2937"/>
                 </a:solidFill>
@@ -5386,7 +5386,7 @@
               </a:rPr>
               <a:t>수</a:t>
             </a:r>
-            <a:endParaRPr lang="ko-KR" sz="5500" dirty="0"/>
+            <a:endParaRPr lang="ko-KR" sz="5900" dirty="0"/>
           </a:p>
         </p:txBody>
       </p:sp>
@@ -5398,7 +5398,7 @@
         </p:nvSpPr>
         <p:spPr>
           <a:xfrm>
-            <a:off x="548640" y="4654296"/>
+            <a:off x="548640" y="4928616"/>
             <a:ext cx="566928" cy="566928"/>
           </a:xfrm>
           <a:prstGeom prst="roundRect">
@@ -5445,12 +5445,12 @@
         </p:nvSpPr>
         <p:spPr>
           <a:xfrm>
-            <a:off x="1344168" y="4206240"/>
-            <a:ext cx="1965960" cy="1463040"/>
+            <a:off x="1344168" y="4343400"/>
+            <a:ext cx="2606040" cy="1737360"/>
           </a:xfrm>
           <a:prstGeom prst="roundRect">
             <a:avLst>
-              <a:gd name="adj" fmla="val 8750"/>
+              <a:gd name="adj" fmla="val 7368"/>
             </a:avLst>
           </a:prstGeom>
           <a:solidFill>
@@ -5492,12 +5492,12 @@
         </p:nvSpPr>
         <p:spPr>
           <a:xfrm>
-            <a:off x="3584448" y="4206240"/>
-            <a:ext cx="1965960" cy="1463040"/>
+            <a:off x="4224528" y="4343400"/>
+            <a:ext cx="2606040" cy="1737360"/>
           </a:xfrm>
           <a:prstGeom prst="roundRect">
             <a:avLst>
-              <a:gd name="adj" fmla="val 8750"/>
+              <a:gd name="adj" fmla="val 7368"/>
             </a:avLst>
           </a:prstGeom>
           <a:solidFill>
@@ -7100,7 +7100,7 @@
                         <a:buNone/>
                       </a:pPr>
                       <a:r>
-                        <a:rPr lang="en-US" sz="3200" b="1" dirty="0">
+                        <a:rPr lang="en-US" sz="4500" b="1" dirty="0">
                           <a:solidFill>
                             <a:srgbClr val="1F2937"/>
                           </a:solidFill>
@@ -7110,7 +7110,7 @@
                         </a:rPr>
                         <a:t>ㄱ</a:t>
                       </a:r>
-                      <a:endParaRPr lang="en-US" sz="3200" dirty="0">
+                      <a:endParaRPr lang="en-US" sz="4500" dirty="0">
                         <a:latin typeface="맑은 고딕" charset="0"/>
                         <a:ea typeface="맑은 고딕" charset="0"/>
                         <a:cs typeface="맑은 고딕" charset="0"/>
@@ -7168,7 +7168,7 @@
                         <a:buNone/>
                       </a:pPr>
                       <a:r>
-                        <a:rPr lang="en-US" sz="3200" b="1" dirty="0">
+                        <a:rPr lang="en-US" sz="4500" b="1" dirty="0">
                           <a:solidFill>
                             <a:srgbClr val="1F2937"/>
                           </a:solidFill>
@@ -7178,7 +7178,7 @@
                         </a:rPr>
                         <a:t>ㄴ</a:t>
                       </a:r>
-                      <a:endParaRPr lang="en-US" sz="3200" dirty="0">
+                      <a:endParaRPr lang="en-US" sz="4500" dirty="0">
                         <a:latin typeface="맑은 고딕" charset="0"/>
                         <a:ea typeface="맑은 고딕" charset="0"/>
                         <a:cs typeface="맑은 고딕" charset="0"/>
@@ -7236,7 +7236,7 @@
                         <a:buNone/>
                       </a:pPr>
                       <a:r>
-                        <a:rPr lang="en-US" sz="3200" b="1" dirty="0">
+                        <a:rPr lang="en-US" sz="4500" b="1" dirty="0">
                           <a:solidFill>
                             <a:srgbClr val="1F2937"/>
                           </a:solidFill>
@@ -7246,7 +7246,7 @@
                         </a:rPr>
                         <a:t>ㄷ</a:t>
                       </a:r>
-                      <a:endParaRPr lang="en-US" sz="3200" dirty="0">
+                      <a:endParaRPr lang="en-US" sz="4500" dirty="0">
                         <a:latin typeface="맑은 고딕" charset="0"/>
                         <a:ea typeface="맑은 고딕" charset="0"/>
                         <a:cs typeface="맑은 고딕" charset="0"/>
@@ -7304,7 +7304,7 @@
                         <a:buNone/>
                       </a:pPr>
                       <a:r>
-                        <a:rPr lang="en-US" sz="3200" b="1" dirty="0">
+                        <a:rPr lang="en-US" sz="4500" b="1" dirty="0">
                           <a:solidFill>
                             <a:srgbClr val="1F2937"/>
                           </a:solidFill>
@@ -7314,7 +7314,7 @@
                         </a:rPr>
                         <a:t>ㄹ</a:t>
                       </a:r>
-                      <a:endParaRPr lang="en-US" sz="3200" dirty="0">
+                      <a:endParaRPr lang="en-US" sz="4500" dirty="0">
                         <a:latin typeface="맑은 고딕" charset="0"/>
                         <a:ea typeface="맑은 고딕" charset="0"/>
                         <a:cs typeface="맑은 고딕" charset="0"/>
@@ -7372,7 +7372,7 @@
                         <a:buNone/>
                       </a:pPr>
                       <a:r>
-                        <a:rPr lang="en-US" sz="3200" b="1" dirty="0">
+                        <a:rPr lang="en-US" sz="4500" b="1" dirty="0">
                           <a:solidFill>
                             <a:srgbClr val="1F2937"/>
                           </a:solidFill>
@@ -7382,7 +7382,7 @@
                         </a:rPr>
                         <a:t>ㅁ</a:t>
                       </a:r>
-                      <a:endParaRPr lang="en-US" sz="3200" dirty="0">
+                      <a:endParaRPr lang="en-US" sz="4500" dirty="0">
                         <a:latin typeface="맑은 고딕" charset="0"/>
                         <a:ea typeface="맑은 고딕" charset="0"/>
                         <a:cs typeface="맑은 고딕" charset="0"/>
@@ -7440,7 +7440,7 @@
                         <a:buNone/>
                       </a:pPr>
                       <a:r>
-                        <a:rPr lang="en-US" sz="3200" b="1" dirty="0">
+                        <a:rPr lang="en-US" sz="4500" b="1" dirty="0">
                           <a:solidFill>
                             <a:srgbClr val="1F2937"/>
                           </a:solidFill>
@@ -7450,7 +7450,7 @@
                         </a:rPr>
                         <a:t>ㅂ</a:t>
                       </a:r>
-                      <a:endParaRPr lang="en-US" sz="3200" dirty="0">
+                      <a:endParaRPr lang="en-US" sz="4500" dirty="0">
                         <a:latin typeface="맑은 고딕" charset="0"/>
                         <a:ea typeface="맑은 고딕" charset="0"/>
                         <a:cs typeface="맑은 고딕" charset="0"/>
@@ -7508,7 +7508,7 @@
                         <a:buNone/>
                       </a:pPr>
                       <a:r>
-                        <a:rPr lang="en-US" sz="3200" b="1" dirty="0">
+                        <a:rPr lang="en-US" sz="4500" b="1" dirty="0">
                           <a:solidFill>
                             <a:srgbClr val="1F2937"/>
                           </a:solidFill>
@@ -7518,7 +7518,7 @@
                         </a:rPr>
                         <a:t>ㅇ</a:t>
                       </a:r>
-                      <a:endParaRPr lang="en-US" sz="3200" dirty="0">
+                      <a:endParaRPr lang="en-US" sz="4500" dirty="0">
                         <a:latin typeface="맑은 고딕" charset="0"/>
                         <a:ea typeface="맑은 고딕" charset="0"/>
                         <a:cs typeface="맑은 고딕" charset="0"/>

--- a/dist/초1/국어/한글/초1_국어_한글_04_받침있는글자_학생용.pptx
+++ b/dist/초1/국어/한글/초1_국어_한글_04_받침있는글자_학생용.pptx
@@ -119,19 +119,19 @@
   <p:extLst>
     <p:ext uri="{521415D9-36F7-43E2-AB2F-B90AF26B5E84}">
       <p14:sectionLst xmlns:p14="http://schemas.microsoft.com/office/powerpoint/2010/main">
-        <p14:section name="도입" id="{965e2592-7d67-2817-bd60-f2c38198e7cf}">
+        <p14:section name="도입" id="{3ed97afc-4df1-3671-c61e-331a387f4912}">
           <p14:sldIdLst>
             <p14:sldId id="256"/>
             <p14:sldId id="257"/>
           </p14:sldIdLst>
         </p14:section>
-        <p14:section name="개념" id="{a0c04ff4-23db-00f9-cae7-e97bb6c5aa03}">
+        <p14:section name="개념" id="{7038100f-8b64-e2ab-1824-e17de6b86543}">
           <p14:sldIdLst>
             <p14:sldId id="258"/>
             <p14:sldId id="259"/>
           </p14:sldIdLst>
         </p14:section>
-        <p14:section name="연습" id="{5913e2cd-ad62-cb31-88ca-d5ac83224eb3}">
+        <p14:section name="연습" id="{c6ebef9f-a6fa-7516-12f1-6f82e739ead7}">
           <p14:sldIdLst>
             <p14:sldId id="260"/>
             <p14:sldId id="261"/>
@@ -140,18 +140,18 @@
             <p14:sldId id="264"/>
           </p14:sldIdLst>
         </p14:section>
-        <p14:section name="확인" id="{5fb5f5bf-61f9-2a06-59fe-2f6ddaeb0f01}">
+        <p14:section name="확인" id="{0f63917d-db54-8bed-b0b6-bfafb7121c07}">
           <p14:sldIdLst>
             <p14:sldId id="265"/>
             <p14:sldId id="266"/>
           </p14:sldIdLst>
         </p14:section>
-        <p14:section name="정리" id="{bedc1f05-3415-6468-6ae2-012aeefff5f6}">
+        <p14:section name="정리" id="{a0ac1b54-8793-2eea-96ff-03535228b406}">
           <p14:sldIdLst>
             <p14:sldId id="267"/>
           </p14:sldIdLst>
         </p14:section>
-        <p14:section name="보충" id="{4f0e8c87-b29e-58f3-b75c-d62430c6b1c9}">
+        <p14:section name="보충" id="{d70be00e-46e5-4c76-296c-2f8e8aefac9f}">
           <p14:sldIdLst>
             <p14:sldId id="268"/>
           </p14:sldIdLst>
@@ -7016,7 +7016,7 @@
           </p:nvPr>
         </p:nvGraphicFramePr>
         <p:xfrm>
-          <a:off x="548640" y="2265680"/>
+          <a:off x="548640" y="2306320"/>
           <a:ext cx="11091672" cy="914400"/>
         </p:xfrm>
         <a:graphic>
@@ -7033,7 +7033,7 @@
                 <a:gridCol w="1386459"/>
                 <a:gridCol w="1386459"/>
               </a:tblGrid>
-              <a:tr h="650240">
+              <a:tr h="629920">
                 <a:tc>
                   <a:txBody>
                     <a:bodyPr/>
@@ -7568,7 +7568,7 @@
                   </a:tcPr>
                 </a:tc>
               </a:tr>
-              <a:tr h="650240">
+              <a:tr h="629920">
                 <a:tc>
                   <a:txBody>
                     <a:bodyPr/>
@@ -8114,7 +8114,7 @@
                   </a:tcPr>
                 </a:tc>
               </a:tr>
-              <a:tr h="650240">
+              <a:tr h="629920">
                 <a:tc>
                   <a:txBody>
                     <a:bodyPr/>
@@ -8660,7 +8660,7 @@
                   </a:tcPr>
                 </a:tc>
               </a:tr>
-              <a:tr h="650240">
+              <a:tr h="629920">
                 <a:tc>
                   <a:txBody>
                     <a:bodyPr/>
